--- a/docs/aios-governance-flow.pptx
+++ b/docs/aios-governance-flow.pptx
@@ -1912,7 +1912,7 @@
           <p:nvPr/>
         </p:nvPicPr>
         <p:blipFill>
-          <a:blip r:embed="rId8"/>
+          <a:blip r:embed="rId6"/>
           <a:stretch>
             <a:fillRect/>
           </a:stretch>
@@ -2026,7 +2026,7 @@
                 <a:ea typeface="Inter Light" pitchFamily="34" charset="-122"/>
                 <a:cs typeface="Inter Light" pitchFamily="34" charset="-120"/>
               </a:rPr>
-              <a:t>Drafted from standards;</a:t>
+              <a:t>Agent drafts them and</a:t>
             </a:r>
             <a:endParaRPr lang="en-US" sz="800" dirty="0"/>
           </a:p>
@@ -2046,7 +2046,7 @@
                 <a:ea typeface="Inter Light" pitchFamily="34" charset="-122"/>
                 <a:cs typeface="Inter Light" pitchFamily="34" charset="-120"/>
               </a:rPr>
-              <a:t>CDM discovers the</a:t>
+              <a:t>finds the columns; a</a:t>
             </a:r>
             <a:endParaRPr lang="en-US" sz="800" dirty="0"/>
           </a:p>
@@ -2066,7 +2066,7 @@
                 <a:ea typeface="Inter Light" pitchFamily="34" charset="-122"/>
                 <a:cs typeface="Inter Light" pitchFamily="34" charset="-120"/>
               </a:rPr>
-              <a:t>physical columns</a:t>
+              <a:t>steward accepts</a:t>
             </a:r>
             <a:endParaRPr lang="en-US" sz="800" dirty="0"/>
           </a:p>
@@ -2099,13 +2099,13 @@
             <a:r>
               <a:rPr lang="en-US" sz="650" b="1" dirty="0">
                 <a:solidFill>
-                  <a:srgbClr val="FF9900"/>
+                  <a:srgbClr val="80DED8"/>
                 </a:solidFill>
                 <a:latin typeface="Inter SemiBold" pitchFamily="34" charset="0"/>
                 <a:ea typeface="Inter SemiBold" pitchFamily="34" charset="-122"/>
                 <a:cs typeface="Inter SemiBold" pitchFamily="34" charset="-120"/>
               </a:rPr>
-              <a:t>PARTIAL</a:t>
+              <a:t>BUILT</a:t>
             </a:r>
             <a:endParaRPr lang="en-US" sz="650" dirty="0"/>
           </a:p>
